--- a/atelier/atelier-s08-contact-me.pptx
+++ b/atelier/atelier-s08-contact-me.pptx
@@ -3316,7 +3316,7 @@
         </p:nvSpPr>
         <p:spPr>
           <a:xfrm>
-            <a:off x="762000" y="6966198"/>
+            <a:off x="762000" y="6670477"/>
             <a:ext cx="8763000" cy="9525"/>
           </a:xfrm>
           <a:prstGeom prst="rect">
@@ -3360,7 +3360,7 @@
         </p:nvSpPr>
         <p:spPr>
           <a:xfrm>
-            <a:off x="762000" y="7718673"/>
+            <a:off x="762000" y="7361932"/>
             <a:ext cx="8763000" cy="9525"/>
           </a:xfrm>
           <a:prstGeom prst="rect">
@@ -3404,7 +3404,7 @@
         </p:nvSpPr>
         <p:spPr>
           <a:xfrm>
-            <a:off x="762000" y="8471148"/>
+            <a:off x="762000" y="8053388"/>
             <a:ext cx="8763000" cy="9525"/>
           </a:xfrm>
           <a:prstGeom prst="rect">
@@ -3448,7 +3448,7 @@
         </p:nvSpPr>
         <p:spPr>
           <a:xfrm>
-            <a:off x="762000" y="9223623"/>
+            <a:off x="762000" y="8744843"/>
             <a:ext cx="8763000" cy="9525"/>
           </a:xfrm>
           <a:prstGeom prst="rect">
@@ -3860,7 +3860,7 @@
         </p:nvSpPr>
         <p:spPr>
           <a:xfrm>
-            <a:off x="762000" y="4527798"/>
+            <a:off x="762000" y="4413498"/>
             <a:ext cx="7786211" cy="1133475"/>
           </a:xfrm>
           <a:prstGeom prst="rect">
@@ -3872,7 +3872,11 @@
           <a:bodyPr wrap="none" anchor="t" lIns="0" rIns="0" tIns="0" bIns="0"/>
           <a:lstStyle/>
           <a:p>
-            <a:pPr algn="l"/>
+            <a:pPr algn="l">
+              <a:lnSpc>
+                <a:spcPct val="92000"/>
+              </a:lnSpc>
+            </a:pPr>
             <a:r>
               <a:rPr sz="8100" i="1" b="0">
                 <a:solidFill>
@@ -3895,7 +3899,7 @@
         </p:nvSpPr>
         <p:spPr>
           <a:xfrm>
-            <a:off x="762000" y="6594723"/>
+            <a:off x="762000" y="6331446"/>
             <a:ext cx="851773" cy="123825"/>
           </a:xfrm>
           <a:prstGeom prst="rect">
@@ -3930,8 +3934,8 @@
         </p:nvSpPr>
         <p:spPr>
           <a:xfrm>
-            <a:off x="7667625" y="6432798"/>
-            <a:ext cx="3352800" cy="323850"/>
+            <a:off x="7667625" y="6198096"/>
+            <a:ext cx="3352800" cy="262830"/>
           </a:xfrm>
           <a:prstGeom prst="rect">
             <a:avLst/>
@@ -3942,7 +3946,11 @@
           <a:bodyPr wrap="none" anchor="t" lIns="0" rIns="0" tIns="0" bIns="0"/>
           <a:lstStyle/>
           <a:p>
-            <a:pPr algn="l"/>
+            <a:pPr algn="l">
+              <a:lnSpc>
+                <a:spcPct val="92000"/>
+              </a:lnSpc>
+            </a:pPr>
             <a:r>
               <a:rPr sz="2250" i="1" b="0">
                 <a:solidFill>
@@ -3965,7 +3973,7 @@
         </p:nvSpPr>
         <p:spPr>
           <a:xfrm>
-            <a:off x="762000" y="7347198"/>
+            <a:off x="762000" y="7022902"/>
             <a:ext cx="969645" cy="123825"/>
           </a:xfrm>
           <a:prstGeom prst="rect">
@@ -4000,8 +4008,8 @@
         </p:nvSpPr>
         <p:spPr>
           <a:xfrm>
-            <a:off x="6714827" y="7185273"/>
-            <a:ext cx="4877276" cy="323850"/>
+            <a:off x="6714827" y="6889552"/>
+            <a:ext cx="4877276" cy="262830"/>
           </a:xfrm>
           <a:prstGeom prst="rect">
             <a:avLst/>
@@ -4012,7 +4020,11 @@
           <a:bodyPr wrap="none" anchor="t" lIns="0" rIns="0" tIns="0" bIns="0"/>
           <a:lstStyle/>
           <a:p>
-            <a:pPr algn="l"/>
+            <a:pPr algn="l">
+              <a:lnSpc>
+                <a:spcPct val="92000"/>
+              </a:lnSpc>
+            </a:pPr>
             <a:r>
               <a:rPr sz="2250" i="1" b="0">
                 <a:solidFill>
@@ -4035,7 +4047,7 @@
         </p:nvSpPr>
         <p:spPr>
           <a:xfrm>
-            <a:off x="762000" y="8099673"/>
+            <a:off x="762000" y="7714357"/>
             <a:ext cx="616506" cy="123825"/>
           </a:xfrm>
           <a:prstGeom prst="rect">
@@ -4070,8 +4082,8 @@
         </p:nvSpPr>
         <p:spPr>
           <a:xfrm>
-            <a:off x="7833717" y="7937748"/>
-            <a:ext cx="3087052" cy="323850"/>
+            <a:off x="7833717" y="7581007"/>
+            <a:ext cx="3087052" cy="262830"/>
           </a:xfrm>
           <a:prstGeom prst="rect">
             <a:avLst/>
@@ -4082,7 +4094,11 @@
           <a:bodyPr wrap="none" anchor="t" lIns="0" rIns="0" tIns="0" bIns="0"/>
           <a:lstStyle/>
           <a:p>
-            <a:pPr algn="l"/>
+            <a:pPr algn="l">
+              <a:lnSpc>
+                <a:spcPct val="92000"/>
+              </a:lnSpc>
+            </a:pPr>
             <a:r>
               <a:rPr sz="2250" i="1" b="0">
                 <a:solidFill>
@@ -4105,7 +4121,7 @@
         </p:nvSpPr>
         <p:spPr>
           <a:xfrm>
-            <a:off x="762000" y="8852148"/>
+            <a:off x="762000" y="8405812"/>
             <a:ext cx="734139" cy="123825"/>
           </a:xfrm>
           <a:prstGeom prst="rect">
@@ -4140,8 +4156,8 @@
         </p:nvSpPr>
         <p:spPr>
           <a:xfrm>
-            <a:off x="7549158" y="8690223"/>
-            <a:ext cx="3542348" cy="323850"/>
+            <a:off x="7549158" y="8272462"/>
+            <a:ext cx="3542348" cy="262830"/>
           </a:xfrm>
           <a:prstGeom prst="rect">
             <a:avLst/>
@@ -4152,7 +4168,11 @@
           <a:bodyPr wrap="none" anchor="t" lIns="0" rIns="0" tIns="0" bIns="0"/>
           <a:lstStyle/>
           <a:p>
-            <a:pPr algn="l"/>
+            <a:pPr algn="l">
+              <a:lnSpc>
+                <a:spcPct val="92000"/>
+              </a:lnSpc>
+            </a:pPr>
             <a:r>
               <a:rPr sz="2250" i="1" b="0">
                 <a:solidFill>
@@ -4175,8 +4195,8 @@
         </p:nvSpPr>
         <p:spPr>
           <a:xfrm>
-            <a:off x="-4876800" y="9518898"/>
-            <a:ext cx="14401800" cy="247650"/>
+            <a:off x="-4876800" y="9040118"/>
+            <a:ext cx="14401800" cy="192732"/>
           </a:xfrm>
           <a:prstGeom prst="rect">
             <a:avLst/>
@@ -4187,7 +4207,11 @@
           <a:bodyPr wrap="none" anchor="t" lIns="0" rIns="0" tIns="0" bIns="0"/>
           <a:lstStyle/>
           <a:p>
-            <a:pPr algn="r"/>
+            <a:pPr algn="r">
+              <a:lnSpc>
+                <a:spcPct val="92000"/>
+              </a:lnSpc>
+            </a:pPr>
             <a:r>
               <a:rPr sz="1650" i="1" b="0">
                 <a:solidFill>
@@ -4210,7 +4234,7 @@
         </p:nvSpPr>
         <p:spPr>
           <a:xfrm>
-            <a:off x="-4876800" y="9823698"/>
+            <a:off x="-4876800" y="9290000"/>
             <a:ext cx="14401800" cy="104775"/>
           </a:xfrm>
           <a:prstGeom prst="rect">

--- a/atelier/atelier-s08-contact-me.pptx
+++ b/atelier/atelier-s08-contact-me.pptx
@@ -3141,7 +3141,7 @@
         <p:spPr>
           <a:xfrm>
             <a:off x="762000" y="762000"/>
-            <a:ext cx="457200" cy="9525"/>
+            <a:ext cx="552450" cy="9525"/>
           </a:xfrm>
           <a:prstGeom prst="rect">
             <a:avLst/>
@@ -3184,8 +3184,8 @@
         </p:nvSpPr>
         <p:spPr>
           <a:xfrm>
-            <a:off x="762000" y="1209675"/>
-            <a:ext cx="457200" cy="9525"/>
+            <a:off x="762000" y="1304925"/>
+            <a:ext cx="552450" cy="9525"/>
           </a:xfrm>
           <a:prstGeom prst="rect">
             <a:avLst/>
@@ -3229,7 +3229,7 @@
         <p:spPr>
           <a:xfrm>
             <a:off x="762000" y="762000"/>
-            <a:ext cx="9525" cy="457200"/>
+            <a:ext cx="9525" cy="552450"/>
           </a:xfrm>
           <a:prstGeom prst="rect">
             <a:avLst/>
@@ -3272,8 +3272,8 @@
         </p:nvSpPr>
         <p:spPr>
           <a:xfrm>
-            <a:off x="1209675" y="762000"/>
-            <a:ext cx="9525" cy="457200"/>
+            <a:off x="1304925" y="762000"/>
+            <a:ext cx="9525" cy="552450"/>
           </a:xfrm>
           <a:prstGeom prst="rect">
             <a:avLst/>
@@ -3316,7 +3316,7 @@
         </p:nvSpPr>
         <p:spPr>
           <a:xfrm>
-            <a:off x="762000" y="6670477"/>
+            <a:off x="762000" y="7161758"/>
             <a:ext cx="8763000" cy="9525"/>
           </a:xfrm>
           <a:prstGeom prst="rect">
@@ -3360,7 +3360,7 @@
         </p:nvSpPr>
         <p:spPr>
           <a:xfrm>
-            <a:off x="762000" y="7361932"/>
+            <a:off x="762000" y="8055173"/>
             <a:ext cx="8763000" cy="9525"/>
           </a:xfrm>
           <a:prstGeom prst="rect">
@@ -3404,7 +3404,7 @@
         </p:nvSpPr>
         <p:spPr>
           <a:xfrm>
-            <a:off x="762000" y="8053388"/>
+            <a:off x="762000" y="8948589"/>
             <a:ext cx="8763000" cy="9525"/>
           </a:xfrm>
           <a:prstGeom prst="rect">
@@ -3448,7 +3448,7 @@
         </p:nvSpPr>
         <p:spPr>
           <a:xfrm>
-            <a:off x="762000" y="8744843"/>
+            <a:off x="762000" y="9842004"/>
             <a:ext cx="8763000" cy="9525"/>
           </a:xfrm>
           <a:prstGeom prst="rect">
@@ -3492,14 +3492,14 @@
         </p:nvSpPr>
         <p:spPr>
           <a:xfrm>
-            <a:off x="762000" y="15735300"/>
+            <a:off x="762000" y="15782925"/>
             <a:ext cx="8763000" cy="9525"/>
           </a:xfrm>
           <a:prstGeom prst="rect">
             <a:avLst/>
           </a:prstGeom>
           <a:solidFill>
-            <a:srgbClr val="524F4B"/>
+            <a:srgbClr val="595552"/>
           </a:solidFill>
           <a:ln>
             <a:noFill/>
@@ -3536,14 +3536,14 @@
         </p:nvSpPr>
         <p:spPr>
           <a:xfrm>
-            <a:off x="762000" y="16373475"/>
+            <a:off x="762000" y="16659225"/>
             <a:ext cx="8763000" cy="9525"/>
           </a:xfrm>
           <a:prstGeom prst="rect">
             <a:avLst/>
           </a:prstGeom>
           <a:solidFill>
-            <a:srgbClr val="524F4B"/>
+            <a:srgbClr val="595552"/>
           </a:solidFill>
           <a:ln>
             <a:noFill/>
@@ -3580,14 +3580,14 @@
         </p:nvSpPr>
         <p:spPr>
           <a:xfrm>
-            <a:off x="762000" y="15735300"/>
-            <a:ext cx="9525" cy="647700"/>
+            <a:off x="762000" y="15782925"/>
+            <a:ext cx="9525" cy="885825"/>
           </a:xfrm>
           <a:prstGeom prst="rect">
             <a:avLst/>
           </a:prstGeom>
           <a:solidFill>
-            <a:srgbClr val="524F4B"/>
+            <a:srgbClr val="595552"/>
           </a:solidFill>
           <a:ln>
             <a:noFill/>
@@ -3624,14 +3624,14 @@
         </p:nvSpPr>
         <p:spPr>
           <a:xfrm>
-            <a:off x="9515475" y="15735300"/>
-            <a:ext cx="9525" cy="647700"/>
+            <a:off x="9515475" y="15782925"/>
+            <a:ext cx="9525" cy="885825"/>
           </a:xfrm>
           <a:prstGeom prst="rect">
             <a:avLst/>
           </a:prstGeom>
           <a:solidFill>
-            <a:srgbClr val="524F4B"/>
+            <a:srgbClr val="595552"/>
           </a:solidFill>
           <a:ln>
             <a:noFill/>
@@ -3668,8 +3668,8 @@
         </p:nvSpPr>
         <p:spPr>
           <a:xfrm>
-            <a:off x="1024416" y="16012004"/>
-            <a:ext cx="94293" cy="94292"/>
+            <a:off x="1077621" y="16165220"/>
+            <a:ext cx="121233" cy="121234"/>
           </a:xfrm>
           <a:prstGeom prst="rect">
             <a:avLst/>
@@ -3712,8 +3712,8 @@
         </p:nvSpPr>
         <p:spPr>
           <a:xfrm>
-            <a:off x="862608" y="909638"/>
-            <a:ext cx="790575" cy="161925"/>
+            <a:off x="880170" y="938212"/>
+            <a:ext cx="886778" cy="200025"/>
           </a:xfrm>
           <a:prstGeom prst="rect">
             <a:avLst/>
@@ -3730,7 +3730,7 @@
               </a:lnSpc>
             </a:pPr>
             <a:r>
-              <a:rPr sz="1275" i="0" b="1" spc="51">
+              <a:rPr sz="1575" i="0" b="1" spc="63">
                 <a:solidFill>
                   <a:srgbClr val="FAF6F0"/>
                 </a:solidFill>
@@ -3751,8 +3751,8 @@
         </p:nvSpPr>
         <p:spPr>
           <a:xfrm>
-            <a:off x="8252668" y="938212"/>
-            <a:ext cx="2416731" cy="104775"/>
+            <a:off x="7565082" y="952500"/>
+            <a:ext cx="3516868" cy="171450"/>
           </a:xfrm>
           <a:prstGeom prst="rect">
             <a:avLst/>
@@ -3765,9 +3765,9 @@
           <a:p>
             <a:pPr algn="l"/>
             <a:r>
-              <a:rPr sz="750" i="0" b="0" spc="105">
+              <a:rPr sz="1125" i="0" b="0" spc="180">
                 <a:solidFill>
-                  <a:srgbClr val="A09D98"/>
+                  <a:srgbClr val="A5A19C"/>
                 </a:solidFill>
                 <a:latin typeface="Space Mono"/>
                 <a:ea typeface="Space Mono"/>
@@ -3786,8 +3786,8 @@
         </p:nvSpPr>
         <p:spPr>
           <a:xfrm>
-            <a:off x="762000" y="3238500"/>
-            <a:ext cx="14401800" cy="133350"/>
+            <a:off x="762000" y="3143250"/>
+            <a:ext cx="14401800" cy="228600"/>
           </a:xfrm>
           <a:prstGeom prst="rect">
             <a:avLst/>
@@ -3800,7 +3800,7 @@
           <a:p>
             <a:pPr algn="l"/>
             <a:r>
-              <a:rPr sz="900" i="0" b="1" spc="306">
+              <a:rPr sz="1575" i="0" b="1" spc="472">
                 <a:solidFill>
                   <a:srgbClr val="BC5B36"/>
                 </a:solidFill>
@@ -3821,8 +3821,8 @@
         </p:nvSpPr>
         <p:spPr>
           <a:xfrm>
-            <a:off x="762000" y="3457575"/>
-            <a:ext cx="9854565" cy="1152525"/>
+            <a:off x="762000" y="3486150"/>
+            <a:ext cx="10731579" cy="1257300"/>
           </a:xfrm>
           <a:prstGeom prst="rect">
             <a:avLst/>
@@ -3839,7 +3839,7 @@
               </a:lnSpc>
             </a:pPr>
             <a:r>
-              <a:rPr sz="8100" i="0" b="1" spc="-243">
+              <a:rPr sz="8850" i="0" b="1" spc="-265">
                 <a:solidFill>
                   <a:srgbClr val="FAF6F0"/>
                 </a:solidFill>
@@ -3860,8 +3860,8 @@
         </p:nvSpPr>
         <p:spPr>
           <a:xfrm>
-            <a:off x="762000" y="4413498"/>
-            <a:ext cx="7786211" cy="1133475"/>
+            <a:off x="762000" y="4520059"/>
+            <a:ext cx="8471773" cy="1247775"/>
           </a:xfrm>
           <a:prstGeom prst="rect">
             <a:avLst/>
@@ -3878,7 +3878,7 @@
               </a:lnSpc>
             </a:pPr>
             <a:r>
-              <a:rPr sz="8100" i="1" b="0">
+              <a:rPr sz="8850" i="1" b="0">
                 <a:solidFill>
                   <a:srgbClr val="BC5B36"/>
                 </a:solidFill>
@@ -3899,8 +3899,8 @@
         </p:nvSpPr>
         <p:spPr>
           <a:xfrm>
-            <a:off x="762000" y="6331446"/>
-            <a:ext cx="851773" cy="123825"/>
+            <a:off x="762000" y="6706493"/>
+            <a:ext cx="1226344" cy="171450"/>
           </a:xfrm>
           <a:prstGeom prst="rect">
             <a:avLst/>
@@ -3913,13 +3913,13 @@
           <a:p>
             <a:pPr algn="l"/>
             <a:r>
-              <a:rPr sz="825" i="0" b="0" spc="82">
+              <a:rPr sz="1200" i="0" b="1" spc="240">
                 <a:solidFill>
                   <a:srgbClr val="BC5B36"/>
                 </a:solidFill>
-                <a:latin typeface="Space Mono"/>
-                <a:ea typeface="Space Mono"/>
-                <a:cs typeface="Space Mono"/>
+                <a:latin typeface="Archivo"/>
+                <a:ea typeface="Archivo"/>
+                <a:cs typeface="Archivo"/>
               </a:rPr>
               <a:t>CALL</a:t>
             </a:r>
@@ -3934,8 +3934,8 @@
         </p:nvSpPr>
         <p:spPr>
           <a:xfrm>
-            <a:off x="7667625" y="6198096"/>
-            <a:ext cx="3352800" cy="262830"/>
+            <a:off x="7048500" y="6544568"/>
+            <a:ext cx="4343400" cy="350490"/>
           </a:xfrm>
           <a:prstGeom prst="rect">
             <a:avLst/>
@@ -3947,6 +3947,267 @@
           <a:lstStyle/>
           <a:p>
             <a:pPr algn="l">
+              <a:lnSpc>
+                <a:spcPct val="92000"/>
+              </a:lnSpc>
+            </a:pPr>
+            <a:r>
+              <a:rPr sz="3000" i="1" b="0">
+                <a:solidFill>
+                  <a:srgbClr val="FAF6F0"/>
+                </a:solidFill>
+                <a:latin typeface="Fraunces"/>
+                <a:ea typeface="Fraunces"/>
+                <a:cs typeface="Fraunces"/>
+              </a:rPr>
+              <a:t>503 · 555 · 0142</a:t>
+            </a:r>
+          </a:p>
+        </p:txBody>
+      </p:sp>
+      <p:sp>
+        <p:nvSpPr>
+          <p:cNvPr id="23" name="TextBox 22"/>
+          <p:cNvSpPr txBox="1"/>
+          <p:nvPr/>
+        </p:nvSpPr>
+        <p:spPr>
+          <a:xfrm>
+            <a:off x="762000" y="7599908"/>
+            <a:ext cx="1383506" cy="171450"/>
+          </a:xfrm>
+          <a:prstGeom prst="rect">
+            <a:avLst/>
+          </a:prstGeom>
+          <a:noFill/>
+        </p:spPr>
+        <p:txBody>
+          <a:bodyPr wrap="none" anchor="t" lIns="0" rIns="0" tIns="0" bIns="0"/>
+          <a:lstStyle/>
+          <a:p>
+            <a:pPr algn="l"/>
+            <a:r>
+              <a:rPr sz="1200" i="0" b="1" spc="240">
+                <a:solidFill>
+                  <a:srgbClr val="BC5B36"/>
+                </a:solidFill>
+                <a:latin typeface="Archivo"/>
+                <a:ea typeface="Archivo"/>
+                <a:cs typeface="Archivo"/>
+              </a:rPr>
+              <a:t>EMAIL</a:t>
+            </a:r>
+          </a:p>
+        </p:txBody>
+      </p:sp>
+      <p:sp>
+        <p:nvSpPr>
+          <p:cNvPr id="24" name="TextBox 23"/>
+          <p:cNvSpPr txBox="1"/>
+          <p:nvPr/>
+        </p:nvSpPr>
+        <p:spPr>
+          <a:xfrm>
+            <a:off x="5778252" y="7437983"/>
+            <a:ext cx="6375797" cy="350490"/>
+          </a:xfrm>
+          <a:prstGeom prst="rect">
+            <a:avLst/>
+          </a:prstGeom>
+          <a:noFill/>
+        </p:spPr>
+        <p:txBody>
+          <a:bodyPr wrap="none" anchor="t" lIns="0" rIns="0" tIns="0" bIns="0"/>
+          <a:lstStyle/>
+          <a:p>
+            <a:pPr algn="l">
+              <a:lnSpc>
+                <a:spcPct val="92000"/>
+              </a:lnSpc>
+            </a:pPr>
+            <a:r>
+              <a:rPr sz="3000" i="1" b="0">
+                <a:solidFill>
+                  <a:srgbClr val="FAF6F0"/>
+                </a:solidFill>
+                <a:latin typeface="Fraunces"/>
+                <a:ea typeface="Fraunces"/>
+                <a:cs typeface="Fraunces"/>
+              </a:rPr>
+              <a:t>hello@studiomaeve.com</a:t>
+            </a:r>
+          </a:p>
+        </p:txBody>
+      </p:sp>
+      <p:sp>
+        <p:nvSpPr>
+          <p:cNvPr id="25" name="TextBox 24"/>
+          <p:cNvSpPr txBox="1"/>
+          <p:nvPr/>
+        </p:nvSpPr>
+        <p:spPr>
+          <a:xfrm>
+            <a:off x="762000" y="8493323"/>
+            <a:ext cx="857964" cy="171450"/>
+          </a:xfrm>
+          <a:prstGeom prst="rect">
+            <a:avLst/>
+          </a:prstGeom>
+          <a:noFill/>
+        </p:spPr>
+        <p:txBody>
+          <a:bodyPr wrap="none" anchor="t" lIns="0" rIns="0" tIns="0" bIns="0"/>
+          <a:lstStyle/>
+          <a:p>
+            <a:pPr algn="l"/>
+            <a:r>
+              <a:rPr sz="1200" i="0" b="1" spc="240">
+                <a:solidFill>
+                  <a:srgbClr val="BC5B36"/>
+                </a:solidFill>
+                <a:latin typeface="Archivo"/>
+                <a:ea typeface="Archivo"/>
+                <a:cs typeface="Archivo"/>
+              </a:rPr>
+              <a:t>DM</a:t>
+            </a:r>
+          </a:p>
+        </p:txBody>
+      </p:sp>
+      <p:sp>
+        <p:nvSpPr>
+          <p:cNvPr id="26" name="TextBox 25"/>
+          <p:cNvSpPr txBox="1"/>
+          <p:nvPr/>
+        </p:nvSpPr>
+        <p:spPr>
+          <a:xfrm>
+            <a:off x="7269956" y="8331398"/>
+            <a:ext cx="3989070" cy="350490"/>
+          </a:xfrm>
+          <a:prstGeom prst="rect">
+            <a:avLst/>
+          </a:prstGeom>
+          <a:noFill/>
+        </p:spPr>
+        <p:txBody>
+          <a:bodyPr wrap="none" anchor="t" lIns="0" rIns="0" tIns="0" bIns="0"/>
+          <a:lstStyle/>
+          <a:p>
+            <a:pPr algn="l">
+              <a:lnSpc>
+                <a:spcPct val="92000"/>
+              </a:lnSpc>
+            </a:pPr>
+            <a:r>
+              <a:rPr sz="3000" i="1" b="0">
+                <a:solidFill>
+                  <a:srgbClr val="FAF6F0"/>
+                </a:solidFill>
+                <a:latin typeface="Fraunces"/>
+                <a:ea typeface="Fraunces"/>
+                <a:cs typeface="Fraunces"/>
+              </a:rPr>
+              <a:t>@studiomaeve</a:t>
+            </a:r>
+          </a:p>
+        </p:txBody>
+      </p:sp>
+      <p:sp>
+        <p:nvSpPr>
+          <p:cNvPr id="27" name="TextBox 26"/>
+          <p:cNvSpPr txBox="1"/>
+          <p:nvPr/>
+        </p:nvSpPr>
+        <p:spPr>
+          <a:xfrm>
+            <a:off x="762000" y="9386739"/>
+            <a:ext cx="1096328" cy="171450"/>
+          </a:xfrm>
+          <a:prstGeom prst="rect">
+            <a:avLst/>
+          </a:prstGeom>
+          <a:noFill/>
+        </p:spPr>
+        <p:txBody>
+          <a:bodyPr wrap="none" anchor="t" lIns="0" rIns="0" tIns="0" bIns="0"/>
+          <a:lstStyle/>
+          <a:p>
+            <a:pPr algn="l"/>
+            <a:r>
+              <a:rPr sz="1200" i="0" b="1" spc="240">
+                <a:solidFill>
+                  <a:srgbClr val="BC5B36"/>
+                </a:solidFill>
+                <a:latin typeface="Archivo"/>
+                <a:ea typeface="Archivo"/>
+                <a:cs typeface="Archivo"/>
+              </a:rPr>
+              <a:t>WEB</a:t>
+            </a:r>
+          </a:p>
+        </p:txBody>
+      </p:sp>
+      <p:sp>
+        <p:nvSpPr>
+          <p:cNvPr id="28" name="TextBox 27"/>
+          <p:cNvSpPr txBox="1"/>
+          <p:nvPr/>
+        </p:nvSpPr>
+        <p:spPr>
+          <a:xfrm>
+            <a:off x="6890445" y="9224814"/>
+            <a:ext cx="4596289" cy="350490"/>
+          </a:xfrm>
+          <a:prstGeom prst="rect">
+            <a:avLst/>
+          </a:prstGeom>
+          <a:noFill/>
+        </p:spPr>
+        <p:txBody>
+          <a:bodyPr wrap="none" anchor="t" lIns="0" rIns="0" tIns="0" bIns="0"/>
+          <a:lstStyle/>
+          <a:p>
+            <a:pPr algn="l">
+              <a:lnSpc>
+                <a:spcPct val="92000"/>
+              </a:lnSpc>
+            </a:pPr>
+            <a:r>
+              <a:rPr sz="3000" i="1" b="0">
+                <a:solidFill>
+                  <a:srgbClr val="FAF6F0"/>
+                </a:solidFill>
+                <a:latin typeface="Fraunces"/>
+                <a:ea typeface="Fraunces"/>
+                <a:cs typeface="Fraunces"/>
+              </a:rPr>
+              <a:t>studiomaeve.com</a:t>
+            </a:r>
+          </a:p>
+        </p:txBody>
+      </p:sp>
+      <p:sp>
+        <p:nvSpPr>
+          <p:cNvPr id="29" name="TextBox 28"/>
+          <p:cNvSpPr txBox="1"/>
+          <p:nvPr/>
+        </p:nvSpPr>
+        <p:spPr>
+          <a:xfrm>
+            <a:off x="-4876800" y="10232529"/>
+            <a:ext cx="14401800" cy="262830"/>
+          </a:xfrm>
+          <a:prstGeom prst="rect">
+            <a:avLst/>
+          </a:prstGeom>
+          <a:noFill/>
+        </p:spPr>
+        <p:txBody>
+          <a:bodyPr wrap="none" anchor="t" lIns="0" rIns="0" tIns="0" bIns="0"/>
+          <a:lstStyle/>
+          <a:p>
+            <a:pPr algn="r">
               <a:lnSpc>
                 <a:spcPct val="92000"/>
               </a:lnSpc>
@@ -3960,21 +4221,21 @@
                 <a:ea typeface="Fraunces"/>
                 <a:cs typeface="Fraunces"/>
               </a:rPr>
-              <a:t>503 · 555 · 0142</a:t>
-            </a:r>
-          </a:p>
-        </p:txBody>
-      </p:sp>
-      <p:sp>
-        <p:nvSpPr>
-          <p:cNvPr id="23" name="TextBox 22"/>
+              <a:t>Maeve Sullivan</a:t>
+            </a:r>
+          </a:p>
+        </p:txBody>
+      </p:sp>
+      <p:sp>
+        <p:nvSpPr>
+          <p:cNvPr id="30" name="TextBox 29"/>
           <p:cNvSpPr txBox="1"/>
           <p:nvPr/>
         </p:nvSpPr>
         <p:spPr>
           <a:xfrm>
-            <a:off x="762000" y="7022902"/>
-            <a:ext cx="969645" cy="123825"/>
+            <a:off x="-4876800" y="10571559"/>
+            <a:ext cx="14401800" cy="161925"/>
           </a:xfrm>
           <a:prstGeom prst="rect">
             <a:avLst/>
@@ -3985,31 +4246,31 @@
           <a:bodyPr wrap="none" anchor="t" lIns="0" rIns="0" tIns="0" bIns="0"/>
           <a:lstStyle/>
           <a:p>
-            <a:pPr algn="l"/>
-            <a:r>
-              <a:rPr sz="825" i="0" b="0" spc="82">
+            <a:pPr algn="r"/>
+            <a:r>
+              <a:rPr sz="1125" i="0" b="1" spc="225">
                 <a:solidFill>
-                  <a:srgbClr val="BC5B36"/>
+                  <a:srgbClr val="A5A19C"/>
                 </a:solidFill>
-                <a:latin typeface="Space Mono"/>
-                <a:ea typeface="Space Mono"/>
-                <a:cs typeface="Space Mono"/>
+                <a:latin typeface="Archivo"/>
+                <a:ea typeface="Archivo"/>
+                <a:cs typeface="Archivo"/>
               </a:rPr>
-              <a:t>EMAIL</a:t>
-            </a:r>
-          </a:p>
-        </p:txBody>
-      </p:sp>
-      <p:sp>
-        <p:nvSpPr>
-          <p:cNvPr id="24" name="TextBox 23"/>
+              <a:t>PRINCIPAL DESIGNER</a:t>
+            </a:r>
+          </a:p>
+        </p:txBody>
+      </p:sp>
+      <p:sp>
+        <p:nvSpPr>
+          <p:cNvPr id="31" name="TextBox 30"/>
           <p:cNvSpPr txBox="1"/>
           <p:nvPr/>
         </p:nvSpPr>
         <p:spPr>
           <a:xfrm>
-            <a:off x="6714827" y="6889552"/>
-            <a:ext cx="4877276" cy="262830"/>
+            <a:off x="1333500" y="16097250"/>
+            <a:ext cx="2637472" cy="257175"/>
           </a:xfrm>
           <a:prstGeom prst="rect">
             <a:avLst/>
@@ -4020,270 +4281,9 @@
           <a:bodyPr wrap="none" anchor="t" lIns="0" rIns="0" tIns="0" bIns="0"/>
           <a:lstStyle/>
           <a:p>
-            <a:pPr algn="l">
-              <a:lnSpc>
-                <a:spcPct val="92000"/>
-              </a:lnSpc>
-            </a:pPr>
-            <a:r>
-              <a:rPr sz="2250" i="1" b="0">
-                <a:solidFill>
-                  <a:srgbClr val="FAF6F0"/>
-                </a:solidFill>
-                <a:latin typeface="Fraunces"/>
-                <a:ea typeface="Fraunces"/>
-                <a:cs typeface="Fraunces"/>
-              </a:rPr>
-              <a:t>hello@studiomaeve.com</a:t>
-            </a:r>
-          </a:p>
-        </p:txBody>
-      </p:sp>
-      <p:sp>
-        <p:nvSpPr>
-          <p:cNvPr id="25" name="TextBox 24"/>
-          <p:cNvSpPr txBox="1"/>
-          <p:nvPr/>
-        </p:nvSpPr>
-        <p:spPr>
-          <a:xfrm>
-            <a:off x="762000" y="7714357"/>
-            <a:ext cx="616506" cy="123825"/>
-          </a:xfrm>
-          <a:prstGeom prst="rect">
-            <a:avLst/>
-          </a:prstGeom>
-          <a:noFill/>
-        </p:spPr>
-        <p:txBody>
-          <a:bodyPr wrap="none" anchor="t" lIns="0" rIns="0" tIns="0" bIns="0"/>
-          <a:lstStyle/>
-          <a:p>
             <a:pPr algn="l"/>
             <a:r>
-              <a:rPr sz="825" i="0" b="0" spc="82">
-                <a:solidFill>
-                  <a:srgbClr val="BC5B36"/>
-                </a:solidFill>
-                <a:latin typeface="Space Mono"/>
-                <a:ea typeface="Space Mono"/>
-                <a:cs typeface="Space Mono"/>
-              </a:rPr>
-              <a:t>DM</a:t>
-            </a:r>
-          </a:p>
-        </p:txBody>
-      </p:sp>
-      <p:sp>
-        <p:nvSpPr>
-          <p:cNvPr id="26" name="TextBox 25"/>
-          <p:cNvSpPr txBox="1"/>
-          <p:nvPr/>
-        </p:nvSpPr>
-        <p:spPr>
-          <a:xfrm>
-            <a:off x="7833717" y="7581007"/>
-            <a:ext cx="3087052" cy="262830"/>
-          </a:xfrm>
-          <a:prstGeom prst="rect">
-            <a:avLst/>
-          </a:prstGeom>
-          <a:noFill/>
-        </p:spPr>
-        <p:txBody>
-          <a:bodyPr wrap="none" anchor="t" lIns="0" rIns="0" tIns="0" bIns="0"/>
-          <a:lstStyle/>
-          <a:p>
-            <a:pPr algn="l">
-              <a:lnSpc>
-                <a:spcPct val="92000"/>
-              </a:lnSpc>
-            </a:pPr>
-            <a:r>
-              <a:rPr sz="2250" i="1" b="0">
-                <a:solidFill>
-                  <a:srgbClr val="FAF6F0"/>
-                </a:solidFill>
-                <a:latin typeface="Fraunces"/>
-                <a:ea typeface="Fraunces"/>
-                <a:cs typeface="Fraunces"/>
-              </a:rPr>
-              <a:t>@studiomaeve</a:t>
-            </a:r>
-          </a:p>
-        </p:txBody>
-      </p:sp>
-      <p:sp>
-        <p:nvSpPr>
-          <p:cNvPr id="27" name="TextBox 26"/>
-          <p:cNvSpPr txBox="1"/>
-          <p:nvPr/>
-        </p:nvSpPr>
-        <p:spPr>
-          <a:xfrm>
-            <a:off x="762000" y="8405812"/>
-            <a:ext cx="734139" cy="123825"/>
-          </a:xfrm>
-          <a:prstGeom prst="rect">
-            <a:avLst/>
-          </a:prstGeom>
-          <a:noFill/>
-        </p:spPr>
-        <p:txBody>
-          <a:bodyPr wrap="none" anchor="t" lIns="0" rIns="0" tIns="0" bIns="0"/>
-          <a:lstStyle/>
-          <a:p>
-            <a:pPr algn="l"/>
-            <a:r>
-              <a:rPr sz="825" i="0" b="0" spc="82">
-                <a:solidFill>
-                  <a:srgbClr val="BC5B36"/>
-                </a:solidFill>
-                <a:latin typeface="Space Mono"/>
-                <a:ea typeface="Space Mono"/>
-                <a:cs typeface="Space Mono"/>
-              </a:rPr>
-              <a:t>WEB</a:t>
-            </a:r>
-          </a:p>
-        </p:txBody>
-      </p:sp>
-      <p:sp>
-        <p:nvSpPr>
-          <p:cNvPr id="28" name="TextBox 27"/>
-          <p:cNvSpPr txBox="1"/>
-          <p:nvPr/>
-        </p:nvSpPr>
-        <p:spPr>
-          <a:xfrm>
-            <a:off x="7549158" y="8272462"/>
-            <a:ext cx="3542348" cy="262830"/>
-          </a:xfrm>
-          <a:prstGeom prst="rect">
-            <a:avLst/>
-          </a:prstGeom>
-          <a:noFill/>
-        </p:spPr>
-        <p:txBody>
-          <a:bodyPr wrap="none" anchor="t" lIns="0" rIns="0" tIns="0" bIns="0"/>
-          <a:lstStyle/>
-          <a:p>
-            <a:pPr algn="l">
-              <a:lnSpc>
-                <a:spcPct val="92000"/>
-              </a:lnSpc>
-            </a:pPr>
-            <a:r>
-              <a:rPr sz="2250" i="1" b="0">
-                <a:solidFill>
-                  <a:srgbClr val="FAF6F0"/>
-                </a:solidFill>
-                <a:latin typeface="Fraunces"/>
-                <a:ea typeface="Fraunces"/>
-                <a:cs typeface="Fraunces"/>
-              </a:rPr>
-              <a:t>studiomaeve.com</a:t>
-            </a:r>
-          </a:p>
-        </p:txBody>
-      </p:sp>
-      <p:sp>
-        <p:nvSpPr>
-          <p:cNvPr id="29" name="TextBox 28"/>
-          <p:cNvSpPr txBox="1"/>
-          <p:nvPr/>
-        </p:nvSpPr>
-        <p:spPr>
-          <a:xfrm>
-            <a:off x="-4876800" y="9040118"/>
-            <a:ext cx="14401800" cy="192732"/>
-          </a:xfrm>
-          <a:prstGeom prst="rect">
-            <a:avLst/>
-          </a:prstGeom>
-          <a:noFill/>
-        </p:spPr>
-        <p:txBody>
-          <a:bodyPr wrap="none" anchor="t" lIns="0" rIns="0" tIns="0" bIns="0"/>
-          <a:lstStyle/>
-          <a:p>
-            <a:pPr algn="r">
-              <a:lnSpc>
-                <a:spcPct val="92000"/>
-              </a:lnSpc>
-            </a:pPr>
-            <a:r>
-              <a:rPr sz="1650" i="1" b="0">
-                <a:solidFill>
-                  <a:srgbClr val="FAF6F0"/>
-                </a:solidFill>
-                <a:latin typeface="Fraunces"/>
-                <a:ea typeface="Fraunces"/>
-                <a:cs typeface="Fraunces"/>
-              </a:rPr>
-              <a:t>Maeve Sullivan</a:t>
-            </a:r>
-          </a:p>
-        </p:txBody>
-      </p:sp>
-      <p:sp>
-        <p:nvSpPr>
-          <p:cNvPr id="30" name="TextBox 29"/>
-          <p:cNvSpPr txBox="1"/>
-          <p:nvPr/>
-        </p:nvSpPr>
-        <p:spPr>
-          <a:xfrm>
-            <a:off x="-4876800" y="9290000"/>
-            <a:ext cx="14401800" cy="104775"/>
-          </a:xfrm>
-          <a:prstGeom prst="rect">
-            <a:avLst/>
-          </a:prstGeom>
-          <a:noFill/>
-        </p:spPr>
-        <p:txBody>
-          <a:bodyPr wrap="none" anchor="t" lIns="0" rIns="0" tIns="0" bIns="0"/>
-          <a:lstStyle/>
-          <a:p>
-            <a:pPr algn="r"/>
-            <a:r>
-              <a:rPr sz="750" i="0" b="0" spc="75">
-                <a:solidFill>
-                  <a:srgbClr val="B7B3AE"/>
-                </a:solidFill>
-                <a:latin typeface="Space Mono"/>
-                <a:ea typeface="Space Mono"/>
-                <a:cs typeface="Space Mono"/>
-              </a:rPr>
-              <a:t>PRINCIPAL DESIGNER</a:t>
-            </a:r>
-          </a:p>
-        </p:txBody>
-      </p:sp>
-      <p:sp>
-        <p:nvSpPr>
-          <p:cNvPr id="31" name="TextBox 30"/>
-          <p:cNvSpPr txBox="1"/>
-          <p:nvPr/>
-        </p:nvSpPr>
-        <p:spPr>
-          <a:xfrm>
-            <a:off x="1238250" y="15978188"/>
-            <a:ext cx="1893808" cy="161925"/>
-          </a:xfrm>
-          <a:prstGeom prst="rect">
-            <a:avLst/>
-          </a:prstGeom>
-          <a:noFill/>
-        </p:spPr>
-        <p:txBody>
-          <a:bodyPr wrap="none" anchor="t" lIns="0" rIns="0" tIns="0" bIns="0"/>
-          <a:lstStyle/>
-          <a:p>
-            <a:pPr algn="l"/>
-            <a:r>
-              <a:rPr sz="1125" i="0" b="1" spc="135">
+              <a:rPr sz="1725" i="0" b="1" spc="172">
                 <a:solidFill>
                   <a:srgbClr val="FAF6F0"/>
                 </a:solidFill>
@@ -4304,8 +4304,8 @@
         </p:nvSpPr>
         <p:spPr>
           <a:xfrm>
-            <a:off x="9105900" y="15954375"/>
-            <a:ext cx="609600" cy="209550"/>
+            <a:off x="8982075" y="16078200"/>
+            <a:ext cx="716280" cy="295275"/>
           </a:xfrm>
           <a:prstGeom prst="rect">
             <a:avLst/>
@@ -4318,7 +4318,7 @@
           <a:p>
             <a:pPr algn="l"/>
             <a:r>
-              <a:rPr sz="1350" i="0" b="0">
+              <a:rPr sz="1950" i="0" b="0">
                 <a:solidFill>
                   <a:srgbClr val="BC5B36"/>
                 </a:solidFill>
@@ -4339,8 +4339,8 @@
         </p:nvSpPr>
         <p:spPr>
           <a:xfrm>
-            <a:off x="2801585" y="17297400"/>
-            <a:ext cx="4683681" cy="123825"/>
+            <a:off x="1823799" y="17192625"/>
+            <a:ext cx="6639401" cy="180975"/>
           </a:xfrm>
           <a:prstGeom prst="rect">
             <a:avLst/>
@@ -4353,9 +4353,9 @@
           <a:p>
             <a:pPr algn="ctr"/>
             <a:r>
-              <a:rPr sz="825" i="0" b="0" spc="165">
+              <a:rPr sz="1200" i="0" b="0" spc="240">
                 <a:solidFill>
-                  <a:srgbClr val="B7B3AE"/>
+                  <a:srgbClr val="BBB8B2"/>
                 </a:solidFill>
                 <a:latin typeface="Space Mono"/>
                 <a:ea typeface="Space Mono"/>

--- a/atelier/atelier-s08-contact-me.pptx
+++ b/atelier/atelier-s08-contact-me.pptx
@@ -3316,7 +3316,7 @@
         </p:nvSpPr>
         <p:spPr>
           <a:xfrm>
-            <a:off x="762000" y="7161758"/>
+            <a:off x="762000" y="7180808"/>
             <a:ext cx="8763000" cy="9525"/>
           </a:xfrm>
           <a:prstGeom prst="rect">
@@ -3360,7 +3360,7 @@
         </p:nvSpPr>
         <p:spPr>
           <a:xfrm>
-            <a:off x="762000" y="8055173"/>
+            <a:off x="762000" y="8074223"/>
             <a:ext cx="8763000" cy="9525"/>
           </a:xfrm>
           <a:prstGeom prst="rect">
@@ -3404,7 +3404,7 @@
         </p:nvSpPr>
         <p:spPr>
           <a:xfrm>
-            <a:off x="762000" y="8948589"/>
+            <a:off x="762000" y="8967639"/>
             <a:ext cx="8763000" cy="9525"/>
           </a:xfrm>
           <a:prstGeom prst="rect">
@@ -3448,7 +3448,7 @@
         </p:nvSpPr>
         <p:spPr>
           <a:xfrm>
-            <a:off x="762000" y="9842004"/>
+            <a:off x="762000" y="9861054"/>
             <a:ext cx="8763000" cy="9525"/>
           </a:xfrm>
           <a:prstGeom prst="rect">
@@ -3751,8 +3751,8 @@
         </p:nvSpPr>
         <p:spPr>
           <a:xfrm>
-            <a:off x="7565082" y="952500"/>
-            <a:ext cx="3516868" cy="171450"/>
+            <a:off x="7107734" y="933450"/>
+            <a:ext cx="4248626" cy="209550"/>
           </a:xfrm>
           <a:prstGeom prst="rect">
             <a:avLst/>
@@ -3765,7 +3765,7 @@
           <a:p>
             <a:pPr algn="l"/>
             <a:r>
-              <a:rPr sz="1125" i="0" b="0" spc="180">
+              <a:rPr sz="1425" i="0" b="0" spc="199">
                 <a:solidFill>
                   <a:srgbClr val="A5A19C"/>
                 </a:solidFill>
@@ -3787,7 +3787,7 @@
         <p:spPr>
           <a:xfrm>
             <a:off x="762000" y="3143250"/>
-            <a:ext cx="14401800" cy="228600"/>
+            <a:ext cx="14401800" cy="247650"/>
           </a:xfrm>
           <a:prstGeom prst="rect">
             <a:avLst/>
@@ -3800,7 +3800,7 @@
           <a:p>
             <a:pPr algn="l"/>
             <a:r>
-              <a:rPr sz="1575" i="0" b="1" spc="472">
+              <a:rPr sz="1650" i="0" b="1" spc="495">
                 <a:solidFill>
                   <a:srgbClr val="BC5B36"/>
                 </a:solidFill>
@@ -3821,7 +3821,7 @@
         </p:nvSpPr>
         <p:spPr>
           <a:xfrm>
-            <a:off x="762000" y="3486150"/>
+            <a:off x="762000" y="3505200"/>
             <a:ext cx="10731579" cy="1257300"/>
           </a:xfrm>
           <a:prstGeom prst="rect">
@@ -3860,7 +3860,7 @@
         </p:nvSpPr>
         <p:spPr>
           <a:xfrm>
-            <a:off x="762000" y="4520059"/>
+            <a:off x="762000" y="4539109"/>
             <a:ext cx="8471773" cy="1247775"/>
           </a:xfrm>
           <a:prstGeom prst="rect">
@@ -3899,8 +3899,8 @@
         </p:nvSpPr>
         <p:spPr>
           <a:xfrm>
-            <a:off x="762000" y="6706493"/>
-            <a:ext cx="1226344" cy="171450"/>
+            <a:off x="762000" y="6696968"/>
+            <a:ext cx="1361599" cy="209550"/>
           </a:xfrm>
           <a:prstGeom prst="rect">
             <a:avLst/>
@@ -3913,7 +3913,7 @@
           <a:p>
             <a:pPr algn="l"/>
             <a:r>
-              <a:rPr sz="1200" i="0" b="1" spc="240">
+              <a:rPr sz="1425" i="0" b="1" spc="256">
                 <a:solidFill>
                   <a:srgbClr val="BC5B36"/>
                 </a:solidFill>
@@ -3934,7 +3934,7 @@
         </p:nvSpPr>
         <p:spPr>
           <a:xfrm>
-            <a:off x="7048500" y="6544568"/>
+            <a:off x="7048500" y="6563618"/>
             <a:ext cx="4343400" cy="350490"/>
           </a:xfrm>
           <a:prstGeom prst="rect">
@@ -3973,8 +3973,8 @@
         </p:nvSpPr>
         <p:spPr>
           <a:xfrm>
-            <a:off x="762000" y="7599908"/>
-            <a:ext cx="1383506" cy="171450"/>
+            <a:off x="762000" y="7590383"/>
+            <a:ext cx="1542574" cy="209550"/>
           </a:xfrm>
           <a:prstGeom prst="rect">
             <a:avLst/>
@@ -3987,7 +3987,7 @@
           <a:p>
             <a:pPr algn="l"/>
             <a:r>
-              <a:rPr sz="1200" i="0" b="1" spc="240">
+              <a:rPr sz="1425" i="0" b="1" spc="256">
                 <a:solidFill>
                   <a:srgbClr val="BC5B36"/>
                 </a:solidFill>
@@ -4008,7 +4008,7 @@
         </p:nvSpPr>
         <p:spPr>
           <a:xfrm>
-            <a:off x="5778252" y="7437983"/>
+            <a:off x="5778252" y="7457033"/>
             <a:ext cx="6375797" cy="350490"/>
           </a:xfrm>
           <a:prstGeom prst="rect">
@@ -4047,8 +4047,8 @@
         </p:nvSpPr>
         <p:spPr>
           <a:xfrm>
-            <a:off x="762000" y="8493323"/>
-            <a:ext cx="857964" cy="171450"/>
+            <a:off x="762000" y="8483798"/>
+            <a:ext cx="935593" cy="209550"/>
           </a:xfrm>
           <a:prstGeom prst="rect">
             <a:avLst/>
@@ -4061,7 +4061,7 @@
           <a:p>
             <a:pPr algn="l"/>
             <a:r>
-              <a:rPr sz="1200" i="0" b="1" spc="240">
+              <a:rPr sz="1425" i="0" b="1" spc="256">
                 <a:solidFill>
                   <a:srgbClr val="BC5B36"/>
                 </a:solidFill>
@@ -4082,7 +4082,7 @@
         </p:nvSpPr>
         <p:spPr>
           <a:xfrm>
-            <a:off x="7269956" y="8331398"/>
+            <a:off x="7269956" y="8350448"/>
             <a:ext cx="3989070" cy="350490"/>
           </a:xfrm>
           <a:prstGeom prst="rect">
@@ -4121,8 +4121,8 @@
         </p:nvSpPr>
         <p:spPr>
           <a:xfrm>
-            <a:off x="762000" y="9386739"/>
-            <a:ext cx="1096328" cy="171450"/>
+            <a:off x="762000" y="9377214"/>
+            <a:ext cx="1213009" cy="209550"/>
           </a:xfrm>
           <a:prstGeom prst="rect">
             <a:avLst/>
@@ -4135,7 +4135,7 @@
           <a:p>
             <a:pPr algn="l"/>
             <a:r>
-              <a:rPr sz="1200" i="0" b="1" spc="240">
+              <a:rPr sz="1425" i="0" b="1" spc="256">
                 <a:solidFill>
                   <a:srgbClr val="BC5B36"/>
                 </a:solidFill>
@@ -4156,7 +4156,7 @@
         </p:nvSpPr>
         <p:spPr>
           <a:xfrm>
-            <a:off x="6890445" y="9224814"/>
+            <a:off x="6890445" y="9243864"/>
             <a:ext cx="4596289" cy="350490"/>
           </a:xfrm>
           <a:prstGeom prst="rect">
@@ -4195,7 +4195,7 @@
         </p:nvSpPr>
         <p:spPr>
           <a:xfrm>
-            <a:off x="-4876800" y="10232529"/>
+            <a:off x="-4876800" y="10251579"/>
             <a:ext cx="14401800" cy="262830"/>
           </a:xfrm>
           <a:prstGeom prst="rect">
@@ -4234,8 +4234,8 @@
         </p:nvSpPr>
         <p:spPr>
           <a:xfrm>
-            <a:off x="-4876800" y="10571559"/>
-            <a:ext cx="14401800" cy="161925"/>
+            <a:off x="-4876800" y="10590609"/>
+            <a:ext cx="14401800" cy="209550"/>
           </a:xfrm>
           <a:prstGeom prst="rect">
             <a:avLst/>
@@ -4248,7 +4248,7 @@
           <a:p>
             <a:pPr algn="r"/>
             <a:r>
-              <a:rPr sz="1125" i="0" b="1" spc="225">
+              <a:rPr sz="1425" i="0" b="1" spc="256">
                 <a:solidFill>
                   <a:srgbClr val="A5A19C"/>
                 </a:solidFill>
@@ -4269,8 +4269,8 @@
         </p:nvSpPr>
         <p:spPr>
           <a:xfrm>
-            <a:off x="1333500" y="16097250"/>
-            <a:ext cx="2637472" cy="257175"/>
+            <a:off x="1333500" y="16078200"/>
+            <a:ext cx="2955846" cy="295275"/>
           </a:xfrm>
           <a:prstGeom prst="rect">
             <a:avLst/>
@@ -4283,7 +4283,7 @@
           <a:p>
             <a:pPr algn="l"/>
             <a:r>
-              <a:rPr sz="1725" i="0" b="1" spc="172">
+              <a:rPr sz="2025" i="0" b="1" spc="162">
                 <a:solidFill>
                   <a:srgbClr val="FAF6F0"/>
                 </a:solidFill>
@@ -4339,8 +4339,8 @@
         </p:nvSpPr>
         <p:spPr>
           <a:xfrm>
-            <a:off x="1823799" y="17192625"/>
-            <a:ext cx="6639401" cy="180975"/>
+            <a:off x="1329690" y="17164050"/>
+            <a:ext cx="7627620" cy="209550"/>
           </a:xfrm>
           <a:prstGeom prst="rect">
             <a:avLst/>
@@ -4353,7 +4353,7 @@
           <a:p>
             <a:pPr algn="ctr"/>
             <a:r>
-              <a:rPr sz="1200" i="0" b="0" spc="240">
+              <a:rPr sz="1425" i="0" b="0" spc="256">
                 <a:solidFill>
                   <a:srgbClr val="BBB8B2"/>
                 </a:solidFill>
